--- a/Capstone_Predictive_Maintenance-1.pptx
+++ b/Capstone_Predictive_Maintenance-1.pptx
@@ -5346,7 +5346,7 @@
                 <a:ea typeface="Calibri" pitchFamily="34" charset="-122"/>
                 <a:cs typeface="Calibri" pitchFamily="34" charset="-120"/>
               </a:rPr>
-              <a:t>Our journey through the FDE approach</a:t>
+              <a:t>Our journey in Phases</a:t>
             </a:r>
             <a:endParaRPr lang="en-US" sz="3000" dirty="0"/>
           </a:p>
@@ -6060,7 +6060,7 @@
         <p:spPr>
           <a:xfrm>
             <a:off x="548640" y="1737360"/>
-            <a:ext cx="6400800" cy="2011680"/>
+            <a:ext cx="6400800" cy="4096512"/>
           </a:xfrm>
           <a:prstGeom prst="rect">
             <a:avLst/>
@@ -6072,66 +6072,25 @@
           <a:bodyPr wrap="square" lIns="0" tIns="0" rIns="0" bIns="0" rtlCol="0" anchor="t"/>
           <a:lstStyle/>
           <a:p>
-            <a:pPr marL="0" indent="0">
-              <a:lnSpc>
-                <a:spcPts val="2400"/>
-              </a:lnSpc>
-              <a:buNone/>
-            </a:pPr>
-            <a:r>
-              <a:rPr lang="en-US" sz="1600" dirty="0">
-                <a:solidFill>
-                  <a:srgbClr val="1A1A1A"/>
-                </a:solidFill>
-                <a:latin typeface="Calibri" pitchFamily="34" charset="0"/>
-                <a:ea typeface="Calibri" pitchFamily="34" charset="-122"/>
-                <a:cs typeface="Calibri" pitchFamily="34" charset="-120"/>
-              </a:rPr>
-              <a:t>A Tier-2 automotive component manufacturer runs 60+ CNC and injection-moulding machines across two plants. Today, maintenance relies on a third-party annual contract with checklist-based servicing – yet machines still break down roughly once every two days.</a:t>
-            </a:r>
+            <a:r>
+              <a:rPr lang="en-IN" sz="1600" dirty="0"/>
+              <a:t>Today, the plant maintenance team relies on a third-party annual maintenance contract with checklist-based servicing, while machines are still breaking down roughly once every two days, causing major production stoppages costing around $10 million on average. </a:t>
+            </a:r>
+          </a:p>
+          <a:p>
+            <a:r>
+              <a:rPr lang="en-IN" sz="1600" dirty="0"/>
+              <a:t>We believe that combining existing telemetry , dashboard indicator and maintenance records will surface early warning signals before breakdown occurs. We will know we are right when machine stoppages reduce from roughly once every two days and warning indicators can be identified before a breakdown occurs. This is constrained by fragmented data across three different formats, including unstructured data, and around 20% of machines having no telemetry. The first thing we will build is a pilot that analyse existing  maintenance records, dashboard metrics, and available telemetry for a small set of critical machines, to test whether the existing data contains consistent patterns or signals that can predict upcoming failures.</a:t>
+            </a:r>
+          </a:p>
+          <a:p>
+            <a:endParaRPr lang="en-IN" sz="1600" dirty="0"/>
+          </a:p>
+          <a:p>
+            <a:endParaRPr lang="en-IN" sz="1600" dirty="0"/>
+          </a:p>
+          <a:p>
             <a:endParaRPr lang="en-US" sz="1600" dirty="0"/>
-          </a:p>
-        </p:txBody>
-      </p:sp>
-      <p:sp>
-        <p:nvSpPr>
-          <p:cNvPr id="7" name="Text 5"/>
-          <p:cNvSpPr txBox="1"/>
-          <p:nvPr/>
-        </p:nvSpPr>
-        <p:spPr>
-          <a:xfrm>
-            <a:off x="548640" y="3794760"/>
-            <a:ext cx="6400800" cy="1005840"/>
-          </a:xfrm>
-          <a:prstGeom prst="rect">
-            <a:avLst/>
-          </a:prstGeom>
-          <a:noFill/>
-          <a:ln/>
-        </p:spPr>
-        <p:txBody>
-          <a:bodyPr wrap="square" lIns="0" tIns="0" rIns="0" bIns="0" rtlCol="0" anchor="t"/>
-          <a:lstStyle/>
-          <a:p>
-            <a:pPr marL="0" indent="0">
-              <a:lnSpc>
-                <a:spcPts val="2000"/>
-              </a:lnSpc>
-              <a:buNone/>
-            </a:pPr>
-            <a:r>
-              <a:rPr lang="en-US" sz="1400" i="1" dirty="0">
-                <a:solidFill>
-                  <a:srgbClr val="00778B"/>
-                </a:solidFill>
-                <a:latin typeface="Calibri" pitchFamily="34" charset="0"/>
-                <a:ea typeface="Calibri" pitchFamily="34" charset="-122"/>
-                <a:cs typeface="Calibri" pitchFamily="34" charset="-120"/>
-              </a:rPr>
-              <a:t>We believe combining existing telemetry, dashboard indicators and maintenance records can surface early warning signals – before a breakdown, not after.</a:t>
-            </a:r>
-            <a:endParaRPr lang="en-US" sz="1400" dirty="0"/>
           </a:p>
         </p:txBody>
       </p:sp>
@@ -6701,7 +6660,7 @@
           <a:bodyPr/>
           <a:lstStyle/>
           <a:p>
-            <a:endParaRPr lang="en-IN"/>
+            <a:endParaRPr lang="en-IN" dirty="0"/>
           </a:p>
         </p:txBody>
       </p:sp>
@@ -6779,8 +6738,8 @@
         </p:nvSpPr>
         <p:spPr>
           <a:xfrm>
-            <a:off x="777240" y="2304288"/>
-            <a:ext cx="4937760" cy="822960"/>
+            <a:off x="777240" y="2212848"/>
+            <a:ext cx="4937760" cy="914400"/>
           </a:xfrm>
           <a:prstGeom prst="rect">
             <a:avLst/>
@@ -6806,6 +6765,50 @@
               </a:rPr>
               <a:t>Machines shutting down every 2 days, causing major business impact</a:t>
             </a:r>
+          </a:p>
+          <a:p>
+            <a:pPr marL="0" indent="0">
+              <a:buNone/>
+            </a:pPr>
+            <a:endParaRPr lang="en-US" sz="1150" dirty="0">
+              <a:solidFill>
+                <a:srgbClr val="1A1A1A"/>
+              </a:solidFill>
+              <a:latin typeface="Calibri" pitchFamily="34" charset="0"/>
+              <a:ea typeface="Calibri" pitchFamily="34" charset="-122"/>
+              <a:cs typeface="Calibri" pitchFamily="34" charset="-120"/>
+            </a:endParaRPr>
+          </a:p>
+          <a:p>
+            <a:r>
+              <a:rPr lang="en-US" sz="1050" b="1" kern="0" spc="50" dirty="0">
+                <a:solidFill>
+                  <a:srgbClr val="00778B"/>
+                </a:solidFill>
+                <a:ea typeface="Calibri" pitchFamily="34" charset="-122"/>
+                <a:cs typeface="Calibri" pitchFamily="34" charset="-120"/>
+              </a:rPr>
+              <a:t>ACTOR AND MOMENT</a:t>
+            </a:r>
+          </a:p>
+          <a:p>
+            <a:r>
+              <a:rPr lang="en-US" sz="1050" dirty="0">
+                <a:solidFill>
+                  <a:srgbClr val="1A1A1A"/>
+                </a:solidFill>
+                <a:latin typeface="Calibri" pitchFamily="34" charset="0"/>
+                <a:ea typeface="Calibri" pitchFamily="34" charset="-122"/>
+                <a:cs typeface="Calibri" pitchFamily="34" charset="-120"/>
+              </a:rPr>
+              <a:t>The plant head and team reported that the machines are stopping unexpectedly during active production shifts.</a:t>
+            </a:r>
+            <a:endParaRPr lang="en-US" sz="1050" dirty="0"/>
+          </a:p>
+          <a:p>
+            <a:pPr marL="0" indent="0">
+              <a:buNone/>
+            </a:pPr>
             <a:endParaRPr lang="en-US" sz="1150" dirty="0"/>
           </a:p>
         </p:txBody>
@@ -6872,7 +6875,7 @@
         </p:nvSpPr>
         <p:spPr>
           <a:xfrm>
-            <a:off x="6446520" y="2029968"/>
+            <a:off x="6473825" y="2029968"/>
             <a:ext cx="4937760" cy="274320"/>
           </a:xfrm>
           <a:prstGeom prst="rect">
@@ -6885,9 +6888,6 @@
           <a:bodyPr wrap="square" lIns="0" tIns="0" rIns="0" bIns="0" rtlCol="0" anchor="ctr"/>
           <a:lstStyle/>
           <a:p>
-            <a:pPr marL="0" indent="0">
-              <a:buNone/>
-            </a:pPr>
             <a:r>
               <a:rPr lang="en-US" sz="1050" b="1" kern="0" spc="50" dirty="0">
                 <a:solidFill>
@@ -6897,7 +6897,7 @@
                 <a:ea typeface="Calibri" pitchFamily="34" charset="-122"/>
                 <a:cs typeface="Calibri" pitchFamily="34" charset="-120"/>
               </a:rPr>
-              <a:t>METRIC</a:t>
+              <a:t>ASSUMPTIONS</a:t>
             </a:r>
             <a:endParaRPr lang="en-US" sz="1050" dirty="0"/>
           </a:p>
@@ -6924,9 +6924,6 @@
           <a:bodyPr wrap="square" lIns="0" tIns="0" rIns="0" bIns="0" rtlCol="0" anchor="t"/>
           <a:lstStyle/>
           <a:p>
-            <a:pPr marL="0" indent="0">
-              <a:buNone/>
-            </a:pPr>
             <a:r>
               <a:rPr lang="en-US" sz="1150" dirty="0">
                 <a:solidFill>
@@ -6936,7 +6933,7 @@
                 <a:ea typeface="Calibri" pitchFamily="34" charset="-122"/>
                 <a:cs typeface="Calibri" pitchFamily="34" charset="-120"/>
               </a:rPr>
-              <a:t>Baseline ~$10M impact → working target ~$5M</a:t>
+              <a:t>Dashboards are reliable; ~20% of legacy machines lack telemetry; client will share OEM scorecard data</a:t>
             </a:r>
             <a:endParaRPr lang="en-US" sz="1150" dirty="0"/>
           </a:p>
@@ -7031,7 +7028,6 @@
               </a:rPr>
               <a:t>CURRENT STATE</a:t>
             </a:r>
-            <a:endParaRPr lang="en-US" sz="1050" dirty="0"/>
           </a:p>
         </p:txBody>
       </p:sp>
@@ -7068,8 +7064,67 @@
                 <a:ea typeface="Calibri" pitchFamily="34" charset="-122"/>
                 <a:cs typeface="Calibri" pitchFamily="34" charset="-120"/>
               </a:rPr>
-              <a:t>Third-party annual contract, checklist-based, last service ~6 months ago</a:t>
-            </a:r>
+              <a:t>Third-party annual contract, checklist-based servicing , last service ~6 months ago</a:t>
+            </a:r>
+          </a:p>
+          <a:p>
+            <a:r>
+              <a:rPr lang="en-US" sz="1050" b="1" kern="0" spc="50" dirty="0">
+                <a:solidFill>
+                  <a:srgbClr val="00778B"/>
+                </a:solidFill>
+                <a:latin typeface="Calibri" pitchFamily="34" charset="0"/>
+                <a:ea typeface="Calibri" pitchFamily="34" charset="-122"/>
+                <a:cs typeface="Calibri" pitchFamily="34" charset="-120"/>
+              </a:rPr>
+              <a:t>METRIC</a:t>
+            </a:r>
+          </a:p>
+          <a:p>
+            <a:r>
+              <a:rPr lang="en-US" sz="1200" dirty="0">
+                <a:solidFill>
+                  <a:srgbClr val="1A1A1A"/>
+                </a:solidFill>
+                <a:latin typeface="Calibri" pitchFamily="34" charset="0"/>
+                <a:ea typeface="Calibri" pitchFamily="34" charset="-122"/>
+                <a:cs typeface="Calibri" pitchFamily="34" charset="-120"/>
+              </a:rPr>
+              <a:t>Baseline ~$10M</a:t>
+            </a:r>
+          </a:p>
+          <a:p>
+            <a:r>
+              <a:rPr lang="en-US" sz="1200" dirty="0">
+                <a:solidFill>
+                  <a:srgbClr val="1A1A1A"/>
+                </a:solidFill>
+                <a:latin typeface="Calibri" pitchFamily="34" charset="0"/>
+                <a:ea typeface="Calibri" pitchFamily="34" charset="-122"/>
+                <a:cs typeface="Calibri" pitchFamily="34" charset="-120"/>
+              </a:rPr>
+              <a:t>Impact → </a:t>
+            </a:r>
+            <a:r>
+              <a:rPr lang="en-US" sz="1150" dirty="0">
+                <a:solidFill>
+                  <a:srgbClr val="1A1A1A"/>
+                </a:solidFill>
+                <a:latin typeface="Calibri" pitchFamily="34" charset="0"/>
+                <a:ea typeface="Calibri" pitchFamily="34" charset="-122"/>
+                <a:cs typeface="Calibri" pitchFamily="34" charset="-120"/>
+              </a:rPr>
+              <a:t>working target ~$5M</a:t>
+            </a:r>
+            <a:endParaRPr lang="en-US" sz="1150" dirty="0"/>
+          </a:p>
+          <a:p>
+            <a:endParaRPr lang="en-US" sz="1200" dirty="0"/>
+          </a:p>
+          <a:p>
+            <a:pPr marL="0" indent="0">
+              <a:buNone/>
+            </a:pPr>
             <a:endParaRPr lang="en-US" sz="1150" dirty="0"/>
           </a:p>
         </p:txBody>
@@ -7136,7 +7191,7 @@
         </p:nvSpPr>
         <p:spPr>
           <a:xfrm>
-            <a:off x="6446520" y="3447288"/>
+            <a:off x="6428232" y="3447288"/>
             <a:ext cx="4937760" cy="274320"/>
           </a:xfrm>
           <a:prstGeom prst="rect">
@@ -7149,9 +7204,6 @@
           <a:bodyPr wrap="square" lIns="0" tIns="0" rIns="0" bIns="0" rtlCol="0" anchor="ctr"/>
           <a:lstStyle/>
           <a:p>
-            <a:pPr marL="0" indent="0">
-              <a:buNone/>
-            </a:pPr>
             <a:r>
               <a:rPr lang="en-US" sz="1050" b="1" kern="0" spc="50" dirty="0">
                 <a:solidFill>
@@ -7161,7 +7213,7 @@
                 <a:ea typeface="Calibri" pitchFamily="34" charset="-122"/>
                 <a:cs typeface="Calibri" pitchFamily="34" charset="-120"/>
               </a:rPr>
-              <a:t>CONSTRAINTS</a:t>
+              <a:t>THIN SLICE</a:t>
             </a:r>
             <a:endParaRPr lang="en-US" sz="1050" dirty="0"/>
           </a:p>
@@ -7176,7 +7228,7 @@
         <p:spPr>
           <a:xfrm>
             <a:off x="6446520" y="3721608"/>
-            <a:ext cx="4937760" cy="822960"/>
+            <a:ext cx="4937760" cy="850392"/>
           </a:xfrm>
           <a:prstGeom prst="rect">
             <a:avLst/>
@@ -7188,20 +7240,36 @@
           <a:bodyPr wrap="square" lIns="0" tIns="0" rIns="0" bIns="0" rtlCol="0" anchor="t"/>
           <a:lstStyle/>
           <a:p>
-            <a:pPr marL="0" indent="0">
-              <a:buNone/>
-            </a:pPr>
-            <a:r>
-              <a:rPr lang="en-US" sz="1150" dirty="0">
-                <a:solidFill>
-                  <a:srgbClr val="1A1A1A"/>
-                </a:solidFill>
-                <a:latin typeface="Calibri" pitchFamily="34" charset="0"/>
-                <a:ea typeface="Calibri" pitchFamily="34" charset="-122"/>
-                <a:cs typeface="Calibri" pitchFamily="34" charset="-120"/>
-              </a:rPr>
-              <a:t>3 data formats (CSV, JSON, unstructured text), CNC + injection moulding, air-gapped network, quarter deadline</a:t>
-            </a:r>
+            <a:r>
+              <a:rPr lang="en-US" sz="1150" dirty="0"/>
+              <a:t>A</a:t>
+            </a:r>
+            <a:r>
+              <a:rPr lang="en-IN" sz="1150" dirty="0"/>
+              <a:t> deterministic data ingestion, normalization and correlation pipeline for a set of critical machines , to test the pre-breakdown patterns</a:t>
+            </a:r>
+          </a:p>
+          <a:p>
+            <a:r>
+              <a:rPr lang="en-US" sz="1050" b="1" kern="0" spc="50" dirty="0">
+                <a:solidFill>
+                  <a:srgbClr val="00778B"/>
+                </a:solidFill>
+                <a:latin typeface="Calibri" pitchFamily="34" charset="0"/>
+                <a:ea typeface="Calibri" pitchFamily="34" charset="-122"/>
+                <a:cs typeface="Calibri" pitchFamily="34" charset="-120"/>
+              </a:rPr>
+              <a:t>SUCCESS AND SIGN-OFF</a:t>
+            </a:r>
+          </a:p>
+          <a:p>
+            <a:r>
+              <a:rPr lang="en-IN" sz="1150" dirty="0"/>
+              <a:t>Correlation between identified telemetry and failure records, lowering the business impact, kill criteria - Issues in the collected data. </a:t>
+            </a:r>
+            <a:endParaRPr lang="en-US" sz="1150" dirty="0"/>
+          </a:p>
+          <a:p>
             <a:endParaRPr lang="en-US" sz="1150" dirty="0"/>
           </a:p>
         </p:txBody>
@@ -7281,9 +7349,6 @@
           <a:bodyPr wrap="square" lIns="0" tIns="0" rIns="0" bIns="0" rtlCol="0" anchor="ctr"/>
           <a:lstStyle/>
           <a:p>
-            <a:pPr marL="0" indent="0">
-              <a:buNone/>
-            </a:pPr>
             <a:r>
               <a:rPr lang="en-US" sz="1050" b="1" kern="0" spc="50" dirty="0">
                 <a:solidFill>
@@ -7293,7 +7358,7 @@
                 <a:ea typeface="Calibri" pitchFamily="34" charset="-122"/>
                 <a:cs typeface="Calibri" pitchFamily="34" charset="-120"/>
               </a:rPr>
-              <a:t>ASSUMPTIONS</a:t>
+              <a:t>CONSTRAINTS</a:t>
             </a:r>
             <a:endParaRPr lang="en-US" sz="1050" dirty="0"/>
           </a:p>
@@ -7320,20 +7385,45 @@
           <a:bodyPr wrap="square" lIns="0" tIns="0" rIns="0" bIns="0" rtlCol="0" anchor="t"/>
           <a:lstStyle/>
           <a:p>
+            <a:r>
+              <a:rPr lang="en-US" sz="1150" dirty="0">
+                <a:solidFill>
+                  <a:srgbClr val="1A1A1A"/>
+                </a:solidFill>
+                <a:latin typeface="Calibri" pitchFamily="34" charset="0"/>
+                <a:ea typeface="Calibri" pitchFamily="34" charset="-122"/>
+                <a:cs typeface="Calibri" pitchFamily="34" charset="-120"/>
+              </a:rPr>
+              <a:t>3 data formats (CSV, JSON, unstructured text), CNC + injection </a:t>
+            </a:r>
+            <a:r>
+              <a:rPr lang="en-US" sz="1150" dirty="0" err="1">
+                <a:solidFill>
+                  <a:srgbClr val="1A1A1A"/>
+                </a:solidFill>
+                <a:latin typeface="Calibri" pitchFamily="34" charset="0"/>
+                <a:ea typeface="Calibri" pitchFamily="34" charset="-122"/>
+                <a:cs typeface="Calibri" pitchFamily="34" charset="-120"/>
+              </a:rPr>
+              <a:t>moulding</a:t>
+            </a:r>
+            <a:r>
+              <a:rPr lang="en-US" sz="1150" dirty="0">
+                <a:solidFill>
+                  <a:srgbClr val="1A1A1A"/>
+                </a:solidFill>
+                <a:latin typeface="Calibri" pitchFamily="34" charset="0"/>
+                <a:ea typeface="Calibri" pitchFamily="34" charset="-122"/>
+                <a:cs typeface="Calibri" pitchFamily="34" charset="-120"/>
+              </a:rPr>
+              <a:t>, air-gapped network, quarter deadline</a:t>
+            </a:r>
+            <a:endParaRPr lang="en-US" sz="1150" dirty="0"/>
+          </a:p>
+          <a:p>
             <a:pPr marL="0" indent="0">
               <a:buNone/>
             </a:pPr>
-            <a:r>
-              <a:rPr lang="en-US" sz="1150" dirty="0">
-                <a:solidFill>
-                  <a:srgbClr val="1A1A1A"/>
-                </a:solidFill>
-                <a:latin typeface="Calibri" pitchFamily="34" charset="0"/>
-                <a:ea typeface="Calibri" pitchFamily="34" charset="-122"/>
-                <a:cs typeface="Calibri" pitchFamily="34" charset="-120"/>
-              </a:rPr>
-              <a:t>Dashboards are reliable; ~20% of legacy machines lack telemetry; client will share OEM scorecard data</a:t>
-            </a:r>
             <a:endParaRPr lang="en-US" sz="1150" dirty="0"/>
           </a:p>
         </p:txBody>
@@ -7425,7 +7515,7 @@
                 <a:ea typeface="Calibri" pitchFamily="34" charset="-122"/>
                 <a:cs typeface="Calibri" pitchFamily="34" charset="-120"/>
               </a:rPr>
-              <a:t>HIGHEST-RISK ASSUMPTION</a:t>
+              <a:t>OPEN QUESTIONS </a:t>
             </a:r>
             <a:endParaRPr lang="en-US" sz="1050" dirty="0"/>
           </a:p>
@@ -7464,7 +7554,7 @@
                 <a:ea typeface="Calibri" pitchFamily="34" charset="-122"/>
                 <a:cs typeface="Calibri" pitchFamily="34" charset="-120"/>
               </a:rPr>
-              <a:t>Existing telemetry and maintenance history contain repeatable signals that appear before failures</a:t>
+              <a:t>Machine hardware failure , </a:t>
             </a:r>
             <a:endParaRPr lang="en-US" sz="1150" dirty="0"/>
           </a:p>
